--- a/ECE1390_Lecture4.pptx
+++ b/ECE1390_Lecture4.pptx
@@ -224,7 +224,7 @@
           <a:p>
             <a:fld id="{FDC6D0C8-F8AA-3A4C-B24F-D986FFB8F017}" type="datetimeFigureOut">
               <a:rPr lang="en-US" smtClean="0"/>
-              <a:t>8/24/24</a:t>
+              <a:t>9/8/24</a:t>
             </a:fld>
             <a:endParaRPr lang="en-US"/>
           </a:p>
@@ -890,7 +890,7 @@
           <a:p>
             <a:fld id="{13E9B49C-C8FD-4344-8CD3-ED4C91409D68}" type="datetimeFigureOut">
               <a:rPr lang="en-US" smtClean="0"/>
-              <a:t>8/24/24</a:t>
+              <a:t>9/8/24</a:t>
             </a:fld>
             <a:endParaRPr lang="en-US"/>
           </a:p>
@@ -1088,7 +1088,7 @@
           <a:p>
             <a:fld id="{13E9B49C-C8FD-4344-8CD3-ED4C91409D68}" type="datetimeFigureOut">
               <a:rPr lang="en-US" smtClean="0"/>
-              <a:t>8/24/24</a:t>
+              <a:t>9/8/24</a:t>
             </a:fld>
             <a:endParaRPr lang="en-US"/>
           </a:p>
@@ -1296,7 +1296,7 @@
           <a:p>
             <a:fld id="{13E9B49C-C8FD-4344-8CD3-ED4C91409D68}" type="datetimeFigureOut">
               <a:rPr lang="en-US" smtClean="0"/>
-              <a:t>8/24/24</a:t>
+              <a:t>9/8/24</a:t>
             </a:fld>
             <a:endParaRPr lang="en-US"/>
           </a:p>
@@ -1494,7 +1494,7 @@
           <a:p>
             <a:fld id="{13E9B49C-C8FD-4344-8CD3-ED4C91409D68}" type="datetimeFigureOut">
               <a:rPr lang="en-US" smtClean="0"/>
-              <a:t>8/24/24</a:t>
+              <a:t>9/8/24</a:t>
             </a:fld>
             <a:endParaRPr lang="en-US"/>
           </a:p>
@@ -1769,7 +1769,7 @@
           <a:p>
             <a:fld id="{13E9B49C-C8FD-4344-8CD3-ED4C91409D68}" type="datetimeFigureOut">
               <a:rPr lang="en-US" smtClean="0"/>
-              <a:t>8/24/24</a:t>
+              <a:t>9/8/24</a:t>
             </a:fld>
             <a:endParaRPr lang="en-US"/>
           </a:p>
@@ -2034,7 +2034,7 @@
           <a:p>
             <a:fld id="{13E9B49C-C8FD-4344-8CD3-ED4C91409D68}" type="datetimeFigureOut">
               <a:rPr lang="en-US" smtClean="0"/>
-              <a:t>8/24/24</a:t>
+              <a:t>9/8/24</a:t>
             </a:fld>
             <a:endParaRPr lang="en-US"/>
           </a:p>
@@ -2446,7 +2446,7 @@
           <a:p>
             <a:fld id="{13E9B49C-C8FD-4344-8CD3-ED4C91409D68}" type="datetimeFigureOut">
               <a:rPr lang="en-US" smtClean="0"/>
-              <a:t>8/24/24</a:t>
+              <a:t>9/8/24</a:t>
             </a:fld>
             <a:endParaRPr lang="en-US"/>
           </a:p>
@@ -2587,7 +2587,7 @@
           <a:p>
             <a:fld id="{13E9B49C-C8FD-4344-8CD3-ED4C91409D68}" type="datetimeFigureOut">
               <a:rPr lang="en-US" smtClean="0"/>
-              <a:t>8/24/24</a:t>
+              <a:t>9/8/24</a:t>
             </a:fld>
             <a:endParaRPr lang="en-US"/>
           </a:p>
@@ -2700,7 +2700,7 @@
           <a:p>
             <a:fld id="{13E9B49C-C8FD-4344-8CD3-ED4C91409D68}" type="datetimeFigureOut">
               <a:rPr lang="en-US" smtClean="0"/>
-              <a:t>8/24/24</a:t>
+              <a:t>9/8/24</a:t>
             </a:fld>
             <a:endParaRPr lang="en-US"/>
           </a:p>
@@ -3011,7 +3011,7 @@
           <a:p>
             <a:fld id="{13E9B49C-C8FD-4344-8CD3-ED4C91409D68}" type="datetimeFigureOut">
               <a:rPr lang="en-US" smtClean="0"/>
-              <a:t>8/24/24</a:t>
+              <a:t>9/8/24</a:t>
             </a:fld>
             <a:endParaRPr lang="en-US"/>
           </a:p>
@@ -3299,7 +3299,7 @@
           <a:p>
             <a:fld id="{13E9B49C-C8FD-4344-8CD3-ED4C91409D68}" type="datetimeFigureOut">
               <a:rPr lang="en-US" smtClean="0"/>
-              <a:t>8/24/24</a:t>
+              <a:t>9/8/24</a:t>
             </a:fld>
             <a:endParaRPr lang="en-US"/>
           </a:p>
@@ -3540,7 +3540,7 @@
           <a:p>
             <a:fld id="{13E9B49C-C8FD-4344-8CD3-ED4C91409D68}" type="datetimeFigureOut">
               <a:rPr lang="en-US" smtClean="0"/>
-              <a:t>8/24/24</a:t>
+              <a:t>9/8/24</a:t>
             </a:fld>
             <a:endParaRPr lang="en-US"/>
           </a:p>
@@ -4906,8 +4906,8 @@
           </a:fontRef>
         </p:style>
       </p:cxnSp>
-      <mc:AlternateContent xmlns:mc="http://schemas.openxmlformats.org/markup-compatibility/2006">
-        <mc:Choice xmlns:a14="http://schemas.microsoft.com/office/drawing/2010/main" Requires="a14">
+      <mc:AlternateContent xmlns:mc="http://schemas.openxmlformats.org/markup-compatibility/2006" xmlns:a14="http://schemas.microsoft.com/office/drawing/2010/main">
+        <mc:Choice Requires="a14">
           <p:sp>
             <p:nvSpPr>
               <p:cNvPr id="16" name="TextBox 15">
@@ -5014,7 +5014,7 @@
             </p:txBody>
           </p:sp>
         </mc:Choice>
-        <mc:Fallback>
+        <mc:Fallback xmlns="">
           <p:sp>
             <p:nvSpPr>
               <p:cNvPr id="16" name="TextBox 15">
@@ -5059,8 +5059,8 @@
           </p:sp>
         </mc:Fallback>
       </mc:AlternateContent>
-      <mc:AlternateContent xmlns:mc="http://schemas.openxmlformats.org/markup-compatibility/2006">
-        <mc:Choice xmlns:a14="http://schemas.microsoft.com/office/drawing/2010/main" Requires="a14">
+      <mc:AlternateContent xmlns:mc="http://schemas.openxmlformats.org/markup-compatibility/2006" xmlns:a14="http://schemas.microsoft.com/office/drawing/2010/main">
+        <mc:Choice Requires="a14">
           <p:sp>
             <p:nvSpPr>
               <p:cNvPr id="4" name="TextBox 3">
@@ -5254,7 +5254,7 @@
             </p:txBody>
           </p:sp>
         </mc:Choice>
-        <mc:Fallback>
+        <mc:Fallback xmlns="">
           <p:sp>
             <p:nvSpPr>
               <p:cNvPr id="4" name="TextBox 3">
@@ -5329,8 +5329,8 @@
           <a:chExt cx="0" cy="0"/>
         </a:xfrm>
       </p:grpSpPr>
-      <mc:AlternateContent xmlns:mc="http://schemas.openxmlformats.org/markup-compatibility/2006">
-        <mc:Choice xmlns:a14="http://schemas.microsoft.com/office/drawing/2010/main" Requires="a14">
+      <mc:AlternateContent xmlns:mc="http://schemas.openxmlformats.org/markup-compatibility/2006" xmlns:a14="http://schemas.microsoft.com/office/drawing/2010/main">
+        <mc:Choice Requires="a14">
           <p:sp>
             <p:nvSpPr>
               <p:cNvPr id="4" name="TextBox 3">
@@ -5524,7 +5524,7 @@
             </p:txBody>
           </p:sp>
         </mc:Choice>
-        <mc:Fallback>
+        <mc:Fallback xmlns="">
           <p:sp>
             <p:nvSpPr>
               <p:cNvPr id="4" name="TextBox 3">
@@ -5780,8 +5780,8 @@
           </a:p>
         </p:txBody>
       </p:sp>
-      <mc:AlternateContent xmlns:mc="http://schemas.openxmlformats.org/markup-compatibility/2006">
-        <mc:Choice xmlns:a14="http://schemas.microsoft.com/office/drawing/2010/main" Requires="a14">
+      <mc:AlternateContent xmlns:mc="http://schemas.openxmlformats.org/markup-compatibility/2006" xmlns:a14="http://schemas.microsoft.com/office/drawing/2010/main">
+        <mc:Choice Requires="a14">
           <p:sp>
             <p:nvSpPr>
               <p:cNvPr id="7" name="TextBox 6">
@@ -5957,7 +5957,7 @@
             </p:txBody>
           </p:sp>
         </mc:Choice>
-        <mc:Fallback>
+        <mc:Fallback xmlns="">
           <p:sp>
             <p:nvSpPr>
               <p:cNvPr id="7" name="TextBox 6">
@@ -6002,8 +6002,8 @@
           </p:sp>
         </mc:Fallback>
       </mc:AlternateContent>
-      <mc:AlternateContent xmlns:mc="http://schemas.openxmlformats.org/markup-compatibility/2006">
-        <mc:Choice xmlns:a14="http://schemas.microsoft.com/office/drawing/2010/main" Requires="a14">
+      <mc:AlternateContent xmlns:mc="http://schemas.openxmlformats.org/markup-compatibility/2006" xmlns:a14="http://schemas.microsoft.com/office/drawing/2010/main">
+        <mc:Choice Requires="a14">
           <p:sp>
             <p:nvSpPr>
               <p:cNvPr id="8" name="TextBox 7">
@@ -6159,7 +6159,7 @@
             </p:txBody>
           </p:sp>
         </mc:Choice>
-        <mc:Fallback>
+        <mc:Fallback xmlns="">
           <p:sp>
             <p:nvSpPr>
               <p:cNvPr id="8" name="TextBox 7">
@@ -6204,8 +6204,8 @@
           </p:sp>
         </mc:Fallback>
       </mc:AlternateContent>
-      <mc:AlternateContent xmlns:mc="http://schemas.openxmlformats.org/markup-compatibility/2006">
-        <mc:Choice xmlns:a14="http://schemas.microsoft.com/office/drawing/2010/main" Requires="a14">
+      <mc:AlternateContent xmlns:mc="http://schemas.openxmlformats.org/markup-compatibility/2006" xmlns:a14="http://schemas.microsoft.com/office/drawing/2010/main">
+        <mc:Choice Requires="a14">
           <p:sp>
             <p:nvSpPr>
               <p:cNvPr id="9" name="TextBox 8">
@@ -6378,7 +6378,7 @@
             </p:txBody>
           </p:sp>
         </mc:Choice>
-        <mc:Fallback>
+        <mc:Fallback xmlns="">
           <p:sp>
             <p:nvSpPr>
               <p:cNvPr id="9" name="TextBox 8">
@@ -6423,8 +6423,8 @@
           </p:sp>
         </mc:Fallback>
       </mc:AlternateContent>
-      <mc:AlternateContent xmlns:mc="http://schemas.openxmlformats.org/markup-compatibility/2006">
-        <mc:Choice xmlns:a14="http://schemas.microsoft.com/office/drawing/2010/main" Requires="a14">
+      <mc:AlternateContent xmlns:mc="http://schemas.openxmlformats.org/markup-compatibility/2006" xmlns:a14="http://schemas.microsoft.com/office/drawing/2010/main">
+        <mc:Choice Requires="a14">
           <p:sp>
             <p:nvSpPr>
               <p:cNvPr id="10" name="TextBox 9">
@@ -6597,7 +6597,7 @@
             </p:txBody>
           </p:sp>
         </mc:Choice>
-        <mc:Fallback>
+        <mc:Fallback xmlns="">
           <p:sp>
             <p:nvSpPr>
               <p:cNvPr id="10" name="TextBox 9">
@@ -6642,8 +6642,8 @@
           </p:sp>
         </mc:Fallback>
       </mc:AlternateContent>
-      <mc:AlternateContent xmlns:mc="http://schemas.openxmlformats.org/markup-compatibility/2006">
-        <mc:Choice xmlns:a14="http://schemas.microsoft.com/office/drawing/2010/main" Requires="a14">
+      <mc:AlternateContent xmlns:mc="http://schemas.openxmlformats.org/markup-compatibility/2006" xmlns:a14="http://schemas.microsoft.com/office/drawing/2010/main">
+        <mc:Choice Requires="a14">
           <p:sp>
             <p:nvSpPr>
               <p:cNvPr id="11" name="TextBox 10">
@@ -7014,7 +7014,7 @@
             </p:txBody>
           </p:sp>
         </mc:Choice>
-        <mc:Fallback>
+        <mc:Fallback xmlns="">
           <p:sp>
             <p:nvSpPr>
               <p:cNvPr id="11" name="TextBox 10">
@@ -7059,8 +7059,8 @@
           </p:sp>
         </mc:Fallback>
       </mc:AlternateContent>
-      <mc:AlternateContent xmlns:mc="http://schemas.openxmlformats.org/markup-compatibility/2006">
-        <mc:Choice xmlns:a14="http://schemas.microsoft.com/office/drawing/2010/main" Requires="a14">
+      <mc:AlternateContent xmlns:mc="http://schemas.openxmlformats.org/markup-compatibility/2006" xmlns:a14="http://schemas.microsoft.com/office/drawing/2010/main">
+        <mc:Choice Requires="a14">
           <p:sp>
             <p:nvSpPr>
               <p:cNvPr id="12" name="TextBox 11">
@@ -7343,7 +7343,7 @@
             </p:txBody>
           </p:sp>
         </mc:Choice>
-        <mc:Fallback>
+        <mc:Fallback xmlns="">
           <p:sp>
             <p:nvSpPr>
               <p:cNvPr id="12" name="TextBox 11">
@@ -7388,8 +7388,8 @@
           </p:sp>
         </mc:Fallback>
       </mc:AlternateContent>
-      <mc:AlternateContent xmlns:mc="http://schemas.openxmlformats.org/markup-compatibility/2006">
-        <mc:Choice xmlns:a14="http://schemas.microsoft.com/office/drawing/2010/main" Requires="a14">
+      <mc:AlternateContent xmlns:mc="http://schemas.openxmlformats.org/markup-compatibility/2006" xmlns:a14="http://schemas.microsoft.com/office/drawing/2010/main">
+        <mc:Choice Requires="a14">
           <p:sp>
             <p:nvSpPr>
               <p:cNvPr id="3" name="TextBox 2">
@@ -7578,7 +7578,7 @@
             </p:txBody>
           </p:sp>
         </mc:Choice>
-        <mc:Fallback>
+        <mc:Fallback xmlns="">
           <p:sp>
             <p:nvSpPr>
               <p:cNvPr id="3" name="TextBox 2">
@@ -7757,8 +7757,8 @@
           </a:p>
         </p:txBody>
       </p:sp>
-      <mc:AlternateContent xmlns:mc="http://schemas.openxmlformats.org/markup-compatibility/2006">
-        <mc:Choice xmlns:a14="http://schemas.microsoft.com/office/drawing/2010/main" Requires="a14">
+      <mc:AlternateContent xmlns:mc="http://schemas.openxmlformats.org/markup-compatibility/2006" xmlns:a14="http://schemas.microsoft.com/office/drawing/2010/main">
+        <mc:Choice Requires="a14">
           <p:sp>
             <p:nvSpPr>
               <p:cNvPr id="7" name="TextBox 6">
@@ -7861,7 +7861,7 @@
             </p:txBody>
           </p:sp>
         </mc:Choice>
-        <mc:Fallback>
+        <mc:Fallback xmlns="">
           <p:sp>
             <p:nvSpPr>
               <p:cNvPr id="7" name="TextBox 6">
@@ -8361,8 +8361,8 @@
           </p:sp>
         </mc:Fallback>
       </mc:AlternateContent>
-      <mc:AlternateContent xmlns:mc="http://schemas.openxmlformats.org/markup-compatibility/2006">
-        <mc:Choice xmlns:a14="http://schemas.microsoft.com/office/drawing/2010/main" Requires="a14">
+      <mc:AlternateContent xmlns:mc="http://schemas.openxmlformats.org/markup-compatibility/2006" xmlns:a14="http://schemas.microsoft.com/office/drawing/2010/main">
+        <mc:Choice Requires="a14">
           <p:sp>
             <p:nvSpPr>
               <p:cNvPr id="16" name="TextBox 15">
@@ -8469,7 +8469,7 @@
             </p:txBody>
           </p:sp>
         </mc:Choice>
-        <mc:Fallback>
+        <mc:Fallback xmlns="">
           <p:sp>
             <p:nvSpPr>
               <p:cNvPr id="16" name="TextBox 15">
@@ -8758,8 +8758,8 @@
           </a:fontRef>
         </p:style>
       </p:cxnSp>
-      <mc:AlternateContent xmlns:mc="http://schemas.openxmlformats.org/markup-compatibility/2006">
-        <mc:Choice xmlns:a14="http://schemas.microsoft.com/office/drawing/2010/main" Requires="a14">
+      <mc:AlternateContent xmlns:mc="http://schemas.openxmlformats.org/markup-compatibility/2006" xmlns:a14="http://schemas.microsoft.com/office/drawing/2010/main">
+        <mc:Choice Requires="a14">
           <p:sp>
             <p:nvSpPr>
               <p:cNvPr id="19" name="TextBox 18">
@@ -9180,7 +9180,7 @@
             </p:txBody>
           </p:sp>
         </mc:Choice>
-        <mc:Fallback>
+        <mc:Fallback xmlns="">
           <p:sp>
             <p:nvSpPr>
               <p:cNvPr id="19" name="TextBox 18">
@@ -12268,8 +12268,8 @@
           </a:p>
         </p:txBody>
       </p:sp>
-      <mc:AlternateContent xmlns:mc="http://schemas.openxmlformats.org/markup-compatibility/2006">
-        <mc:Choice xmlns:a14="http://schemas.microsoft.com/office/drawing/2010/main" Requires="a14">
+      <mc:AlternateContent xmlns:mc="http://schemas.openxmlformats.org/markup-compatibility/2006" xmlns:a14="http://schemas.microsoft.com/office/drawing/2010/main">
+        <mc:Choice Requires="a14">
           <p:sp>
             <p:nvSpPr>
               <p:cNvPr id="2" name="TextBox 1">
@@ -12298,6 +12298,7 @@
               </a:bodyPr>
               <a:lstStyle/>
               <a:p>
+                <a:pPr/>
                 <a14:m>
                   <m:oMathPara xmlns:m="http://schemas.openxmlformats.org/officeDocument/2006/math">
                     <m:oMathParaPr>
@@ -12376,7 +12377,13 @@
                             <a:rPr lang="en-US" sz="3200" b="0" i="1" smtClean="0">
                               <a:latin typeface="Cambria Math" panose="02040503050406030204" pitchFamily="18" charset="0"/>
                             </a:rPr>
-                            <m:t>𝑐𝑜𝑙𝑜𝑟</m:t>
+                            <m:t>𝑐</m:t>
+                          </m:r>
+                          <m:r>
+                            <a:rPr lang="en-US" sz="3200" b="0" i="1" smtClean="0">
+                              <a:latin typeface="Cambria Math" panose="02040503050406030204" pitchFamily="18" charset="0"/>
+                            </a:rPr>
+                            <m:t>𝑜𝑙𝑜𝑟</m:t>
                           </m:r>
                         </m:sub>
                         <m:sup/>
@@ -12616,7 +12623,7 @@
             </p:txBody>
           </p:sp>
         </mc:Choice>
-        <mc:Fallback>
+        <mc:Fallback xmlns="">
           <p:sp>
             <p:nvSpPr>
               <p:cNvPr id="2" name="TextBox 1">
@@ -12661,8 +12668,8 @@
           </p:sp>
         </mc:Fallback>
       </mc:AlternateContent>
-      <mc:AlternateContent xmlns:mc="http://schemas.openxmlformats.org/markup-compatibility/2006">
-        <mc:Choice xmlns:a14="http://schemas.microsoft.com/office/drawing/2010/main" Requires="a14">
+      <mc:AlternateContent xmlns:mc="http://schemas.openxmlformats.org/markup-compatibility/2006" xmlns:a14="http://schemas.microsoft.com/office/drawing/2010/main">
+        <mc:Choice Requires="a14">
           <p:sp>
             <p:nvSpPr>
               <p:cNvPr id="3" name="TextBox 2">
@@ -12691,6 +12698,7 @@
               </a:bodyPr>
               <a:lstStyle/>
               <a:p>
+                <a:pPr/>
                 <a14:m>
                   <m:oMathPara xmlns:m="http://schemas.openxmlformats.org/officeDocument/2006/math">
                     <m:oMathParaPr>
@@ -12828,7 +12836,7 @@
             </p:txBody>
           </p:sp>
         </mc:Choice>
-        <mc:Fallback>
+        <mc:Fallback xmlns="">
           <p:sp>
             <p:nvSpPr>
               <p:cNvPr id="3" name="TextBox 2">
@@ -13081,8 +13089,8 @@
           </a:p>
         </p:txBody>
       </p:sp>
-      <mc:AlternateContent xmlns:mc="http://schemas.openxmlformats.org/markup-compatibility/2006">
-        <mc:Choice xmlns:a14="http://schemas.microsoft.com/office/drawing/2010/main" Requires="a14">
+      <mc:AlternateContent xmlns:mc="http://schemas.openxmlformats.org/markup-compatibility/2006" xmlns:a14="http://schemas.microsoft.com/office/drawing/2010/main">
+        <mc:Choice Requires="a14">
           <p:sp>
             <p:nvSpPr>
               <p:cNvPr id="4" name="TextBox 3">
@@ -13270,7 +13278,7 @@
             </p:txBody>
           </p:sp>
         </mc:Choice>
-        <mc:Fallback>
+        <mc:Fallback xmlns="">
           <p:sp>
             <p:nvSpPr>
               <p:cNvPr id="4" name="TextBox 3">
@@ -13315,8 +13323,8 @@
           </p:sp>
         </mc:Fallback>
       </mc:AlternateContent>
-      <mc:AlternateContent xmlns:mc="http://schemas.openxmlformats.org/markup-compatibility/2006">
-        <mc:Choice xmlns:a14="http://schemas.microsoft.com/office/drawing/2010/main" Requires="a14">
+      <mc:AlternateContent xmlns:mc="http://schemas.openxmlformats.org/markup-compatibility/2006" xmlns:a14="http://schemas.microsoft.com/office/drawing/2010/main">
+        <mc:Choice Requires="a14">
           <p:sp>
             <p:nvSpPr>
               <p:cNvPr id="8" name="TextBox 7">
@@ -13547,7 +13555,7 @@
             </p:txBody>
           </p:sp>
         </mc:Choice>
-        <mc:Fallback>
+        <mc:Fallback xmlns="">
           <p:sp>
             <p:nvSpPr>
               <p:cNvPr id="8" name="TextBox 7">
@@ -13592,8 +13600,8 @@
           </p:sp>
         </mc:Fallback>
       </mc:AlternateContent>
-      <mc:AlternateContent xmlns:mc="http://schemas.openxmlformats.org/markup-compatibility/2006">
-        <mc:Choice xmlns:a14="http://schemas.microsoft.com/office/drawing/2010/main" Requires="a14">
+      <mc:AlternateContent xmlns:mc="http://schemas.openxmlformats.org/markup-compatibility/2006" xmlns:a14="http://schemas.microsoft.com/office/drawing/2010/main">
+        <mc:Choice Requires="a14">
           <p:sp>
             <p:nvSpPr>
               <p:cNvPr id="9" name="TextBox 8">
@@ -13845,7 +13853,7 @@
             </p:txBody>
           </p:sp>
         </mc:Choice>
-        <mc:Fallback>
+        <mc:Fallback xmlns="">
           <p:sp>
             <p:nvSpPr>
               <p:cNvPr id="9" name="TextBox 8">
@@ -13920,8 +13928,8 @@
           <a:chExt cx="0" cy="0"/>
         </a:xfrm>
       </p:grpSpPr>
-      <mc:AlternateContent xmlns:mc="http://schemas.openxmlformats.org/markup-compatibility/2006">
-        <mc:Choice xmlns:a14="http://schemas.microsoft.com/office/drawing/2010/main" Requires="a14">
+      <mc:AlternateContent xmlns:mc="http://schemas.openxmlformats.org/markup-compatibility/2006" xmlns:a14="http://schemas.microsoft.com/office/drawing/2010/main">
+        <mc:Choice Requires="a14">
           <p:sp>
             <p:nvSpPr>
               <p:cNvPr id="4" name="TextBox 3">
@@ -14109,7 +14117,7 @@
             </p:txBody>
           </p:sp>
         </mc:Choice>
-        <mc:Fallback>
+        <mc:Fallback xmlns="">
           <p:sp>
             <p:nvSpPr>
               <p:cNvPr id="4" name="TextBox 3">
@@ -14154,8 +14162,8 @@
           </p:sp>
         </mc:Fallback>
       </mc:AlternateContent>
-      <mc:AlternateContent xmlns:mc="http://schemas.openxmlformats.org/markup-compatibility/2006">
-        <mc:Choice xmlns:a14="http://schemas.microsoft.com/office/drawing/2010/main" Requires="a14">
+      <mc:AlternateContent xmlns:mc="http://schemas.openxmlformats.org/markup-compatibility/2006" xmlns:a14="http://schemas.microsoft.com/office/drawing/2010/main">
+        <mc:Choice Requires="a14">
           <p:sp>
             <p:nvSpPr>
               <p:cNvPr id="5" name="TextBox 4">
@@ -14418,7 +14426,7 @@
             </p:txBody>
           </p:sp>
         </mc:Choice>
-        <mc:Fallback>
+        <mc:Fallback xmlns="">
           <p:sp>
             <p:nvSpPr>
               <p:cNvPr id="5" name="TextBox 4">
@@ -20333,8 +20341,8 @@
           </a:p>
         </p:txBody>
       </p:sp>
-      <mc:AlternateContent xmlns:mc="http://schemas.openxmlformats.org/markup-compatibility/2006">
-        <mc:Choice xmlns:a14="http://schemas.microsoft.com/office/drawing/2010/main" Requires="a14">
+      <mc:AlternateContent xmlns:mc="http://schemas.openxmlformats.org/markup-compatibility/2006" xmlns:a14="http://schemas.microsoft.com/office/drawing/2010/main">
+        <mc:Choice Requires="a14">
           <p:sp>
             <p:nvSpPr>
               <p:cNvPr id="4" name="TextBox 3">
@@ -20528,7 +20536,7 @@
             </p:txBody>
           </p:sp>
         </mc:Choice>
-        <mc:Fallback>
+        <mc:Fallback xmlns="">
           <p:sp>
             <p:nvSpPr>
               <p:cNvPr id="4" name="TextBox 3">
@@ -20755,8 +20763,8 @@
           </a:prstGeom>
         </p:spPr>
       </p:pic>
-      <mc:AlternateContent xmlns:mc="http://schemas.openxmlformats.org/markup-compatibility/2006">
-        <mc:Choice xmlns:a14="http://schemas.microsoft.com/office/drawing/2010/main" Requires="a14">
+      <mc:AlternateContent xmlns:mc="http://schemas.openxmlformats.org/markup-compatibility/2006" xmlns:a14="http://schemas.microsoft.com/office/drawing/2010/main">
+        <mc:Choice Requires="a14">
           <p:sp>
             <p:nvSpPr>
               <p:cNvPr id="11" name="TextBox 10">
@@ -20785,6 +20793,7 @@
               </a:bodyPr>
               <a:lstStyle/>
               <a:p>
+                <a:pPr/>
                 <a14:m>
                   <m:oMathPara xmlns:m="http://schemas.openxmlformats.org/officeDocument/2006/math">
                     <m:oMathParaPr>
@@ -20985,7 +20994,7 @@
             </p:txBody>
           </p:sp>
         </mc:Choice>
-        <mc:Fallback>
+        <mc:Fallback xmlns="">
           <p:sp>
             <p:nvSpPr>
               <p:cNvPr id="11" name="TextBox 10">
@@ -21030,8 +21039,8 @@
           </p:sp>
         </mc:Fallback>
       </mc:AlternateContent>
-      <mc:AlternateContent xmlns:mc="http://schemas.openxmlformats.org/markup-compatibility/2006">
-        <mc:Choice xmlns:a14="http://schemas.microsoft.com/office/drawing/2010/main" Requires="a14">
+      <mc:AlternateContent xmlns:mc="http://schemas.openxmlformats.org/markup-compatibility/2006" xmlns:a14="http://schemas.microsoft.com/office/drawing/2010/main">
+        <mc:Choice Requires="a14">
           <p:sp>
             <p:nvSpPr>
               <p:cNvPr id="12" name="TextBox 11">
@@ -21060,6 +21069,7 @@
               </a:bodyPr>
               <a:lstStyle/>
               <a:p>
+                <a:pPr/>
                 <a14:m>
                   <m:oMathPara xmlns:m="http://schemas.openxmlformats.org/officeDocument/2006/math">
                     <m:oMathParaPr>
@@ -21216,7 +21226,7 @@
             </p:txBody>
           </p:sp>
         </mc:Choice>
-        <mc:Fallback>
+        <mc:Fallback xmlns="">
           <p:sp>
             <p:nvSpPr>
               <p:cNvPr id="12" name="TextBox 11">
@@ -21291,8 +21301,8 @@
           <a:chExt cx="0" cy="0"/>
         </a:xfrm>
       </p:grpSpPr>
-      <mc:AlternateContent xmlns:mc="http://schemas.openxmlformats.org/markup-compatibility/2006">
-        <mc:Choice xmlns:a14="http://schemas.microsoft.com/office/drawing/2010/main" Requires="a14">
+      <mc:AlternateContent xmlns:mc="http://schemas.openxmlformats.org/markup-compatibility/2006" xmlns:a14="http://schemas.microsoft.com/office/drawing/2010/main">
+        <mc:Choice Requires="a14">
           <p:sp>
             <p:nvSpPr>
               <p:cNvPr id="4" name="TextBox 3">
@@ -21474,7 +21484,7 @@
             </p:txBody>
           </p:sp>
         </mc:Choice>
-        <mc:Fallback>
+        <mc:Fallback xmlns="">
           <p:sp>
             <p:nvSpPr>
               <p:cNvPr id="4" name="TextBox 3">
@@ -21519,8 +21529,8 @@
           </p:sp>
         </mc:Fallback>
       </mc:AlternateContent>
-      <mc:AlternateContent xmlns:mc="http://schemas.openxmlformats.org/markup-compatibility/2006">
-        <mc:Choice xmlns:a14="http://schemas.microsoft.com/office/drawing/2010/main" Requires="a14">
+      <mc:AlternateContent xmlns:mc="http://schemas.openxmlformats.org/markup-compatibility/2006" xmlns:a14="http://schemas.microsoft.com/office/drawing/2010/main">
+        <mc:Choice Requires="a14">
           <p:sp>
             <p:nvSpPr>
               <p:cNvPr id="5" name="TextBox 4">
@@ -22108,7 +22118,7 @@
             </p:txBody>
           </p:sp>
         </mc:Choice>
-        <mc:Fallback>
+        <mc:Fallback xmlns="">
           <p:sp>
             <p:nvSpPr>
               <p:cNvPr id="5" name="TextBox 4">
@@ -22153,8 +22163,8 @@
           </p:sp>
         </mc:Fallback>
       </mc:AlternateContent>
-      <mc:AlternateContent xmlns:mc="http://schemas.openxmlformats.org/markup-compatibility/2006">
-        <mc:Choice xmlns:a14="http://schemas.microsoft.com/office/drawing/2010/main" Requires="a14">
+      <mc:AlternateContent xmlns:mc="http://schemas.openxmlformats.org/markup-compatibility/2006" xmlns:a14="http://schemas.microsoft.com/office/drawing/2010/main">
+        <mc:Choice Requires="a14">
           <p:sp>
             <p:nvSpPr>
               <p:cNvPr id="6" name="TextBox 5">
@@ -22481,7 +22491,7 @@
             </p:txBody>
           </p:sp>
         </mc:Choice>
-        <mc:Fallback>
+        <mc:Fallback xmlns="">
           <p:sp>
             <p:nvSpPr>
               <p:cNvPr id="6" name="TextBox 5">
@@ -22588,8 +22598,8 @@
           </a:p>
         </p:txBody>
       </p:sp>
-      <mc:AlternateContent xmlns:mc="http://schemas.openxmlformats.org/markup-compatibility/2006">
-        <mc:Choice xmlns:a14="http://schemas.microsoft.com/office/drawing/2010/main" Requires="a14">
+      <mc:AlternateContent xmlns:mc="http://schemas.openxmlformats.org/markup-compatibility/2006" xmlns:a14="http://schemas.microsoft.com/office/drawing/2010/main">
+        <mc:Choice Requires="a14">
           <p:sp>
             <p:nvSpPr>
               <p:cNvPr id="3" name="Content Placeholder 2">
@@ -22839,7 +22849,7 @@
             </p:txBody>
           </p:sp>
         </mc:Choice>
-        <mc:Fallback>
+        <mc:Fallback xmlns="">
           <p:sp>
             <p:nvSpPr>
               <p:cNvPr id="3" name="Content Placeholder 2">
@@ -22937,8 +22947,8 @@
           </a:p>
         </p:txBody>
       </p:sp>
-      <mc:AlternateContent xmlns:mc="http://schemas.openxmlformats.org/markup-compatibility/2006">
-        <mc:Choice xmlns:a14="http://schemas.microsoft.com/office/drawing/2010/main" Requires="a14">
+      <mc:AlternateContent xmlns:mc="http://schemas.openxmlformats.org/markup-compatibility/2006" xmlns:a14="http://schemas.microsoft.com/office/drawing/2010/main">
+        <mc:Choice Requires="a14">
           <p:sp>
             <p:nvSpPr>
               <p:cNvPr id="10" name="TextBox 9">
@@ -23011,7 +23021,7 @@
             </p:txBody>
           </p:sp>
         </mc:Choice>
-        <mc:Fallback>
+        <mc:Fallback xmlns="">
           <p:sp>
             <p:nvSpPr>
               <p:cNvPr id="10" name="TextBox 9">
@@ -23056,8 +23066,8 @@
           </p:sp>
         </mc:Fallback>
       </mc:AlternateContent>
-      <mc:AlternateContent xmlns:mc="http://schemas.openxmlformats.org/markup-compatibility/2006">
-        <mc:Choice xmlns:a14="http://schemas.microsoft.com/office/drawing/2010/main" Requires="a14">
+      <mc:AlternateContent xmlns:mc="http://schemas.openxmlformats.org/markup-compatibility/2006" xmlns:a14="http://schemas.microsoft.com/office/drawing/2010/main">
+        <mc:Choice Requires="a14">
           <p:sp>
             <p:nvSpPr>
               <p:cNvPr id="11" name="TextBox 10">
@@ -23113,7 +23123,7 @@
             </p:txBody>
           </p:sp>
         </mc:Choice>
-        <mc:Fallback>
+        <mc:Fallback xmlns="">
           <p:sp>
             <p:nvSpPr>
               <p:cNvPr id="11" name="TextBox 10">
@@ -23158,8 +23168,8 @@
           </p:sp>
         </mc:Fallback>
       </mc:AlternateContent>
-      <mc:AlternateContent xmlns:mc="http://schemas.openxmlformats.org/markup-compatibility/2006">
-        <mc:Choice xmlns:a14="http://schemas.microsoft.com/office/drawing/2010/main" Requires="a14">
+      <mc:AlternateContent xmlns:mc="http://schemas.openxmlformats.org/markup-compatibility/2006" xmlns:a14="http://schemas.microsoft.com/office/drawing/2010/main">
+        <mc:Choice Requires="a14">
           <p:sp>
             <p:nvSpPr>
               <p:cNvPr id="12" name="TextBox 11">
@@ -23384,7 +23394,7 @@
             </p:txBody>
           </p:sp>
         </mc:Choice>
-        <mc:Fallback>
+        <mc:Fallback xmlns="">
           <p:sp>
             <p:nvSpPr>
               <p:cNvPr id="12" name="TextBox 11">
@@ -23446,7 +23456,7 @@
             <p:spPr>
               <a:xfrm>
                 <a:off x="5993938" y="2348818"/>
-                <a:ext cx="1990866" cy="380232"/>
+                <a:ext cx="2035750" cy="378693"/>
               </a:xfrm>
               <a:prstGeom prst="rect">
                 <a:avLst/>
@@ -23501,7 +23511,7 @@
                     <m:sSup>
                       <m:sSupPr>
                         <m:ctrlPr>
-                          <a:rPr lang="en-US" i="1">
+                          <a:rPr lang="en-US" i="1" smtClean="0">
                             <a:latin typeface="Cambria Math" panose="02040503050406030204" pitchFamily="18" charset="0"/>
                             <a:ea typeface="Cambria Math" panose="02040503050406030204" pitchFamily="18" charset="0"/>
                           </a:rPr>
@@ -23603,7 +23613,7 @@
                                 <a:latin typeface="Cambria Math" panose="02040503050406030204" pitchFamily="18" charset="0"/>
                                 <a:ea typeface="Cambria Math" panose="02040503050406030204" pitchFamily="18" charset="0"/>
                               </a:rPr>
-                              <m:t>5</m:t>
+                              <m:t>6</m:t>
                             </m:r>
                           </m:den>
                         </m:f>
@@ -23634,7 +23644,7 @@
             <p:spPr>
               <a:xfrm>
                 <a:off x="5993938" y="2348818"/>
-                <a:ext cx="1990866" cy="380232"/>
+                <a:ext cx="2035750" cy="378693"/>
               </a:xfrm>
               <a:prstGeom prst="rect">
                 <a:avLst/>
@@ -23642,7 +23652,7 @@
               <a:blipFill>
                 <a:blip r:embed="rId5"/>
                 <a:stretch>
-                  <a:fillRect l="-3797" r="-1266" b="-3125"/>
+                  <a:fillRect l="-3704" b="-6452"/>
                 </a:stretch>
               </a:blipFill>
             </p:spPr>
@@ -23678,7 +23688,7 @@
             <p:spPr>
               <a:xfrm>
                 <a:off x="6815609" y="2695510"/>
-                <a:ext cx="1451679" cy="379591"/>
+                <a:ext cx="1496564" cy="378052"/>
               </a:xfrm>
               <a:prstGeom prst="rect">
                 <a:avLst/>
@@ -23812,7 +23822,7 @@
                                 <a:latin typeface="Cambria Math" panose="02040503050406030204" pitchFamily="18" charset="0"/>
                                 <a:ea typeface="Cambria Math" panose="02040503050406030204" pitchFamily="18" charset="0"/>
                               </a:rPr>
-                              <m:t>5</m:t>
+                              <m:t>6</m:t>
                             </m:r>
                           </m:den>
                         </m:f>
@@ -23843,7 +23853,7 @@
             <p:spPr>
               <a:xfrm>
                 <a:off x="6815609" y="2695510"/>
-                <a:ext cx="1451679" cy="379591"/>
+                <a:ext cx="1496564" cy="378052"/>
               </a:xfrm>
               <a:prstGeom prst="rect">
                 <a:avLst/>
@@ -23851,7 +23861,7 @@
               <a:blipFill>
                 <a:blip r:embed="rId6"/>
                 <a:stretch>
-                  <a:fillRect l="-5217" r="-1739" b="-6667"/>
+                  <a:fillRect l="-5042" b="-6667"/>
                 </a:stretch>
               </a:blipFill>
             </p:spPr>
@@ -23887,7 +23897,7 @@
             <p:spPr>
               <a:xfrm>
                 <a:off x="7067055" y="3041561"/>
-                <a:ext cx="1451679" cy="380232"/>
+                <a:ext cx="1496564" cy="378693"/>
               </a:xfrm>
               <a:prstGeom prst="rect">
                 <a:avLst/>
@@ -24021,7 +24031,7 @@
                                 <a:latin typeface="Cambria Math" panose="02040503050406030204" pitchFamily="18" charset="0"/>
                                 <a:ea typeface="Cambria Math" panose="02040503050406030204" pitchFamily="18" charset="0"/>
                               </a:rPr>
-                              <m:t>5</m:t>
+                              <m:t>6</m:t>
                             </m:r>
                           </m:den>
                         </m:f>
@@ -24052,7 +24062,7 @@
             <p:spPr>
               <a:xfrm>
                 <a:off x="7067055" y="3041561"/>
-                <a:ext cx="1451679" cy="380232"/>
+                <a:ext cx="1496564" cy="378693"/>
               </a:xfrm>
               <a:prstGeom prst="rect">
                 <a:avLst/>
@@ -24060,7 +24070,7 @@
               <a:blipFill>
                 <a:blip r:embed="rId7"/>
                 <a:stretch>
-                  <a:fillRect l="-5217" r="-1739" b="-3226"/>
+                  <a:fillRect l="-5042" b="-3226"/>
                 </a:stretch>
               </a:blipFill>
             </p:spPr>
@@ -24096,7 +24106,7 @@
             <p:spPr>
               <a:xfrm>
                 <a:off x="7329338" y="3387612"/>
-                <a:ext cx="1451679" cy="380232"/>
+                <a:ext cx="1496564" cy="378693"/>
               </a:xfrm>
               <a:prstGeom prst="rect">
                 <a:avLst/>
@@ -24230,7 +24240,7 @@
                                 <a:latin typeface="Cambria Math" panose="02040503050406030204" pitchFamily="18" charset="0"/>
                                 <a:ea typeface="Cambria Math" panose="02040503050406030204" pitchFamily="18" charset="0"/>
                               </a:rPr>
-                              <m:t>5</m:t>
+                              <m:t>6</m:t>
                             </m:r>
                           </m:den>
                         </m:f>
@@ -24261,7 +24271,7 @@
             <p:spPr>
               <a:xfrm>
                 <a:off x="7329338" y="3387612"/>
-                <a:ext cx="1451679" cy="380232"/>
+                <a:ext cx="1496564" cy="378693"/>
               </a:xfrm>
               <a:prstGeom prst="rect">
                 <a:avLst/>
@@ -24269,7 +24279,7 @@
               <a:blipFill>
                 <a:blip r:embed="rId8"/>
                 <a:stretch>
-                  <a:fillRect l="-4310" r="-1724" b="-6452"/>
+                  <a:fillRect l="-4167" b="-6452"/>
                 </a:stretch>
               </a:blipFill>
             </p:spPr>
@@ -24305,7 +24315,7 @@
             <p:spPr>
               <a:xfrm>
                 <a:off x="7665007" y="3733663"/>
-                <a:ext cx="1451679" cy="379143"/>
+                <a:ext cx="1496564" cy="377604"/>
               </a:xfrm>
               <a:prstGeom prst="rect">
                 <a:avLst/>
@@ -24439,7 +24449,7 @@
                                 <a:latin typeface="Cambria Math" panose="02040503050406030204" pitchFamily="18" charset="0"/>
                                 <a:ea typeface="Cambria Math" panose="02040503050406030204" pitchFamily="18" charset="0"/>
                               </a:rPr>
-                              <m:t>5</m:t>
+                              <m:t>6</m:t>
                             </m:r>
                           </m:den>
                         </m:f>
@@ -24470,7 +24480,7 @@
             <p:spPr>
               <a:xfrm>
                 <a:off x="7665007" y="3733663"/>
-                <a:ext cx="1451679" cy="379143"/>
+                <a:ext cx="1496564" cy="377604"/>
               </a:xfrm>
               <a:prstGeom prst="rect">
                 <a:avLst/>
@@ -24478,7 +24488,7 @@
               <a:blipFill>
                 <a:blip r:embed="rId9"/>
                 <a:stretch>
-                  <a:fillRect l="-5172" r="-862" b="-6452"/>
+                  <a:fillRect l="-5042" b="-6452"/>
                 </a:stretch>
               </a:blipFill>
             </p:spPr>
@@ -24514,7 +24524,7 @@
             <p:spPr>
               <a:xfrm>
                 <a:off x="8055177" y="4079714"/>
-                <a:ext cx="1451679" cy="383246"/>
+                <a:ext cx="1496564" cy="381708"/>
               </a:xfrm>
               <a:prstGeom prst="rect">
                 <a:avLst/>
@@ -24648,7 +24658,7 @@
                                 <a:latin typeface="Cambria Math" panose="02040503050406030204" pitchFamily="18" charset="0"/>
                                 <a:ea typeface="Cambria Math" panose="02040503050406030204" pitchFamily="18" charset="0"/>
                               </a:rPr>
-                              <m:t>5</m:t>
+                              <m:t>6</m:t>
                             </m:r>
                           </m:den>
                         </m:f>
@@ -24679,7 +24689,7 @@
             <p:spPr>
               <a:xfrm>
                 <a:off x="8055177" y="4079714"/>
-                <a:ext cx="1451679" cy="383246"/>
+                <a:ext cx="1496564" cy="381708"/>
               </a:xfrm>
               <a:prstGeom prst="rect">
                 <a:avLst/>
@@ -24687,7 +24697,7 @@
               <a:blipFill>
                 <a:blip r:embed="rId10"/>
                 <a:stretch>
-                  <a:fillRect l="-5217" r="-1739" b="-3226"/>
+                  <a:fillRect l="-5042" b="-3226"/>
                 </a:stretch>
               </a:blipFill>
             </p:spPr>
@@ -24774,8 +24784,8 @@
           </a:p>
         </p:txBody>
       </p:sp>
-      <mc:AlternateContent xmlns:mc="http://schemas.openxmlformats.org/markup-compatibility/2006">
-        <mc:Choice xmlns:a14="http://schemas.microsoft.com/office/drawing/2010/main" Requires="a14">
+      <mc:AlternateContent xmlns:mc="http://schemas.openxmlformats.org/markup-compatibility/2006" xmlns:a14="http://schemas.microsoft.com/office/drawing/2010/main">
+        <mc:Choice Requires="a14">
           <p:sp>
             <p:nvSpPr>
               <p:cNvPr id="5" name="TextBox 4">
@@ -25006,7 +25016,7 @@
             </p:txBody>
           </p:sp>
         </mc:Choice>
-        <mc:Fallback>
+        <mc:Fallback xmlns="">
           <p:sp>
             <p:nvSpPr>
               <p:cNvPr id="5" name="TextBox 4">
@@ -25109,8 +25119,8 @@
           </a:p>
         </p:txBody>
       </p:sp>
-      <mc:AlternateContent xmlns:mc="http://schemas.openxmlformats.org/markup-compatibility/2006">
-        <mc:Choice xmlns:a14="http://schemas.microsoft.com/office/drawing/2010/main" Requires="a14">
+      <mc:AlternateContent xmlns:mc="http://schemas.openxmlformats.org/markup-compatibility/2006" xmlns:a14="http://schemas.microsoft.com/office/drawing/2010/main">
+        <mc:Choice Requires="a14">
           <p:sp>
             <p:nvSpPr>
               <p:cNvPr id="8" name="TextBox 7">
@@ -25485,7 +25495,7 @@
             </p:txBody>
           </p:sp>
         </mc:Choice>
-        <mc:Fallback>
+        <mc:Fallback xmlns="">
           <p:sp>
             <p:nvSpPr>
               <p:cNvPr id="8" name="TextBox 7">
@@ -25530,8 +25540,8 @@
           </p:sp>
         </mc:Fallback>
       </mc:AlternateContent>
-      <mc:AlternateContent xmlns:mc="http://schemas.openxmlformats.org/markup-compatibility/2006">
-        <mc:Choice xmlns:a14="http://schemas.microsoft.com/office/drawing/2010/main" Requires="a14">
+      <mc:AlternateContent xmlns:mc="http://schemas.openxmlformats.org/markup-compatibility/2006" xmlns:a14="http://schemas.microsoft.com/office/drawing/2010/main">
+        <mc:Choice Requires="a14">
           <p:sp>
             <p:nvSpPr>
               <p:cNvPr id="3" name="TextBox 2">
@@ -25933,7 +25943,7 @@
             </p:txBody>
           </p:sp>
         </mc:Choice>
-        <mc:Fallback>
+        <mc:Fallback xmlns="">
           <p:sp>
             <p:nvSpPr>
               <p:cNvPr id="3" name="TextBox 2">
@@ -26036,8 +26046,8 @@
           </a:p>
         </p:txBody>
       </p:sp>
-      <mc:AlternateContent xmlns:mc="http://schemas.openxmlformats.org/markup-compatibility/2006">
-        <mc:Choice xmlns:a14="http://schemas.microsoft.com/office/drawing/2010/main" Requires="a14">
+      <mc:AlternateContent xmlns:mc="http://schemas.openxmlformats.org/markup-compatibility/2006" xmlns:a14="http://schemas.microsoft.com/office/drawing/2010/main">
+        <mc:Choice Requires="a14">
           <p:sp>
             <p:nvSpPr>
               <p:cNvPr id="4" name="TextBox 3">
@@ -26102,7 +26112,7 @@
             </p:txBody>
           </p:sp>
         </mc:Choice>
-        <mc:Fallback>
+        <mc:Fallback xmlns="">
           <p:sp>
             <p:nvSpPr>
               <p:cNvPr id="4" name="TextBox 3">
@@ -26147,8 +26157,8 @@
           </p:sp>
         </mc:Fallback>
       </mc:AlternateContent>
-      <mc:AlternateContent xmlns:mc="http://schemas.openxmlformats.org/markup-compatibility/2006">
-        <mc:Choice xmlns:a14="http://schemas.microsoft.com/office/drawing/2010/main" Requires="a14">
+      <mc:AlternateContent xmlns:mc="http://schemas.openxmlformats.org/markup-compatibility/2006" xmlns:a14="http://schemas.microsoft.com/office/drawing/2010/main">
+        <mc:Choice Requires="a14">
           <p:sp>
             <p:nvSpPr>
               <p:cNvPr id="6" name="TextBox 5">
@@ -26342,7 +26352,7 @@
             </p:txBody>
           </p:sp>
         </mc:Choice>
-        <mc:Fallback>
+        <mc:Fallback xmlns="">
           <p:sp>
             <p:nvSpPr>
               <p:cNvPr id="6" name="TextBox 5">
@@ -26387,8 +26397,8 @@
           </p:sp>
         </mc:Fallback>
       </mc:AlternateContent>
-      <mc:AlternateContent xmlns:mc="http://schemas.openxmlformats.org/markup-compatibility/2006">
-        <mc:Choice xmlns:a14="http://schemas.microsoft.com/office/drawing/2010/main" Requires="a14">
+      <mc:AlternateContent xmlns:mc="http://schemas.openxmlformats.org/markup-compatibility/2006" xmlns:a14="http://schemas.microsoft.com/office/drawing/2010/main">
+        <mc:Choice Requires="a14">
           <p:sp>
             <p:nvSpPr>
               <p:cNvPr id="11" name="TextBox 10">
@@ -26694,7 +26704,7 @@
             </p:txBody>
           </p:sp>
         </mc:Choice>
-        <mc:Fallback>
+        <mc:Fallback xmlns="">
           <p:sp>
             <p:nvSpPr>
               <p:cNvPr id="11" name="TextBox 10">
@@ -26739,8 +26749,8 @@
           </p:sp>
         </mc:Fallback>
       </mc:AlternateContent>
-      <mc:AlternateContent xmlns:mc="http://schemas.openxmlformats.org/markup-compatibility/2006">
-        <mc:Choice xmlns:a14="http://schemas.microsoft.com/office/drawing/2010/main" Requires="a14">
+      <mc:AlternateContent xmlns:mc="http://schemas.openxmlformats.org/markup-compatibility/2006" xmlns:a14="http://schemas.microsoft.com/office/drawing/2010/main">
+        <mc:Choice Requires="a14">
           <p:sp>
             <p:nvSpPr>
               <p:cNvPr id="14" name="TextBox 13">
@@ -28719,7 +28729,7 @@
             </p:txBody>
           </p:sp>
         </mc:Choice>
-        <mc:Fallback>
+        <mc:Fallback xmlns="">
           <p:sp>
             <p:nvSpPr>
               <p:cNvPr id="14" name="TextBox 13">
@@ -28962,8 +28972,8 @@
           </a:prstGeom>
         </p:spPr>
       </p:pic>
-      <mc:AlternateContent xmlns:mc="http://schemas.openxmlformats.org/markup-compatibility/2006">
-        <mc:Choice xmlns:a14="http://schemas.microsoft.com/office/drawing/2010/main" Requires="a14">
+      <mc:AlternateContent xmlns:mc="http://schemas.openxmlformats.org/markup-compatibility/2006" xmlns:a14="http://schemas.microsoft.com/office/drawing/2010/main">
+        <mc:Choice Requires="a14">
           <p:sp>
             <p:nvSpPr>
               <p:cNvPr id="5" name="TextBox 4">
@@ -29065,7 +29075,7 @@
             </p:txBody>
           </p:sp>
         </mc:Choice>
-        <mc:Fallback>
+        <mc:Fallback xmlns="">
           <p:sp>
             <p:nvSpPr>
               <p:cNvPr id="5" name="TextBox 4">
@@ -29140,8 +29150,8 @@
           <a:chExt cx="0" cy="0"/>
         </a:xfrm>
       </p:grpSpPr>
-      <mc:AlternateContent xmlns:mc="http://schemas.openxmlformats.org/markup-compatibility/2006">
-        <mc:Choice xmlns:a14="http://schemas.microsoft.com/office/drawing/2010/main" Requires="a14">
+      <mc:AlternateContent xmlns:mc="http://schemas.openxmlformats.org/markup-compatibility/2006" xmlns:a14="http://schemas.microsoft.com/office/drawing/2010/main">
+        <mc:Choice Requires="a14">
           <p:sp>
             <p:nvSpPr>
               <p:cNvPr id="4" name="TextBox 3">
@@ -29244,7 +29254,7 @@
             </p:txBody>
           </p:sp>
         </mc:Choice>
-        <mc:Fallback>
+        <mc:Fallback xmlns="">
           <p:sp>
             <p:nvSpPr>
               <p:cNvPr id="4" name="TextBox 3">
@@ -29472,8 +29482,8 @@
           </a:p>
         </p:txBody>
       </p:sp>
-      <mc:AlternateContent xmlns:mc="http://schemas.openxmlformats.org/markup-compatibility/2006">
-        <mc:Choice xmlns:a14="http://schemas.microsoft.com/office/drawing/2010/main" Requires="a14">
+      <mc:AlternateContent xmlns:mc="http://schemas.openxmlformats.org/markup-compatibility/2006" xmlns:a14="http://schemas.microsoft.com/office/drawing/2010/main">
+        <mc:Choice Requires="a14">
           <p:sp>
             <p:nvSpPr>
               <p:cNvPr id="7" name="TextBox 6">
@@ -29662,7 +29672,7 @@
             </p:txBody>
           </p:sp>
         </mc:Choice>
-        <mc:Fallback>
+        <mc:Fallback xmlns="">
           <p:sp>
             <p:nvSpPr>
               <p:cNvPr id="7" name="TextBox 6">
@@ -29707,8 +29717,8 @@
           </p:sp>
         </mc:Fallback>
       </mc:AlternateContent>
-      <mc:AlternateContent xmlns:mc="http://schemas.openxmlformats.org/markup-compatibility/2006">
-        <mc:Choice xmlns:a14="http://schemas.microsoft.com/office/drawing/2010/main" Requires="a14">
+      <mc:AlternateContent xmlns:mc="http://schemas.openxmlformats.org/markup-compatibility/2006" xmlns:a14="http://schemas.microsoft.com/office/drawing/2010/main">
+        <mc:Choice Requires="a14">
           <p:sp>
             <p:nvSpPr>
               <p:cNvPr id="8" name="TextBox 7">
@@ -30022,7 +30032,7 @@
             </p:txBody>
           </p:sp>
         </mc:Choice>
-        <mc:Fallback>
+        <mc:Fallback xmlns="">
           <p:sp>
             <p:nvSpPr>
               <p:cNvPr id="8" name="TextBox 7">
@@ -30562,8 +30572,8 @@
           </p:sp>
         </mc:Fallback>
       </mc:AlternateContent>
-      <mc:AlternateContent xmlns:mc="http://schemas.openxmlformats.org/markup-compatibility/2006">
-        <mc:Choice xmlns:a14="http://schemas.microsoft.com/office/drawing/2010/main" Requires="a14">
+      <mc:AlternateContent xmlns:mc="http://schemas.openxmlformats.org/markup-compatibility/2006" xmlns:a14="http://schemas.microsoft.com/office/drawing/2010/main">
+        <mc:Choice Requires="a14">
           <p:sp>
             <p:nvSpPr>
               <p:cNvPr id="14" name="TextBox 13">
@@ -30645,7 +30655,7 @@
             </p:txBody>
           </p:sp>
         </mc:Choice>
-        <mc:Fallback>
+        <mc:Fallback xmlns="">
           <p:sp>
             <p:nvSpPr>
               <p:cNvPr id="14" name="TextBox 13">
@@ -30834,8 +30844,8 @@
           </a:p>
         </p:txBody>
       </p:sp>
-      <mc:AlternateContent xmlns:mc="http://schemas.openxmlformats.org/markup-compatibility/2006">
-        <mc:Choice xmlns:a14="http://schemas.microsoft.com/office/drawing/2010/main" Requires="a14">
+      <mc:AlternateContent xmlns:mc="http://schemas.openxmlformats.org/markup-compatibility/2006" xmlns:a14="http://schemas.microsoft.com/office/drawing/2010/main">
+        <mc:Choice Requires="a14">
           <p:sp>
             <p:nvSpPr>
               <p:cNvPr id="13" name="TextBox 12">
@@ -30938,7 +30948,7 @@
             </p:txBody>
           </p:sp>
         </mc:Choice>
-        <mc:Fallback>
+        <mc:Fallback xmlns="">
           <p:sp>
             <p:nvSpPr>
               <p:cNvPr id="13" name="TextBox 12">
@@ -30983,8 +30993,8 @@
           </p:sp>
         </mc:Fallback>
       </mc:AlternateContent>
-      <mc:AlternateContent xmlns:mc="http://schemas.openxmlformats.org/markup-compatibility/2006">
-        <mc:Choice xmlns:a14="http://schemas.microsoft.com/office/drawing/2010/main" Requires="a14">
+      <mc:AlternateContent xmlns:mc="http://schemas.openxmlformats.org/markup-compatibility/2006" xmlns:a14="http://schemas.microsoft.com/office/drawing/2010/main">
+        <mc:Choice Requires="a14">
           <p:sp>
             <p:nvSpPr>
               <p:cNvPr id="14" name="TextBox 13">
@@ -31066,7 +31076,7 @@
             </p:txBody>
           </p:sp>
         </mc:Choice>
-        <mc:Fallback>
+        <mc:Fallback xmlns="">
           <p:sp>
             <p:nvSpPr>
               <p:cNvPr id="14" name="TextBox 13">
@@ -31181,8 +31191,8 @@
           </a:p>
         </p:txBody>
       </p:sp>
-      <mc:AlternateContent xmlns:mc="http://schemas.openxmlformats.org/markup-compatibility/2006">
-        <mc:Choice xmlns:a14="http://schemas.microsoft.com/office/drawing/2010/main" Requires="a14">
+      <mc:AlternateContent xmlns:mc="http://schemas.openxmlformats.org/markup-compatibility/2006" xmlns:a14="http://schemas.microsoft.com/office/drawing/2010/main">
+        <mc:Choice Requires="a14">
           <p:sp>
             <p:nvSpPr>
               <p:cNvPr id="3" name="TextBox 2">
@@ -31295,7 +31305,7 @@
             </p:txBody>
           </p:sp>
         </mc:Choice>
-        <mc:Fallback>
+        <mc:Fallback xmlns="">
           <p:sp>
             <p:nvSpPr>
               <p:cNvPr id="3" name="TextBox 2">
@@ -31340,8 +31350,8 @@
           </p:sp>
         </mc:Fallback>
       </mc:AlternateContent>
-      <mc:AlternateContent xmlns:mc="http://schemas.openxmlformats.org/markup-compatibility/2006">
-        <mc:Choice xmlns:a14="http://schemas.microsoft.com/office/drawing/2010/main" Requires="a14">
+      <mc:AlternateContent xmlns:mc="http://schemas.openxmlformats.org/markup-compatibility/2006" xmlns:a14="http://schemas.microsoft.com/office/drawing/2010/main">
+        <mc:Choice Requires="a14">
           <p:sp>
             <p:nvSpPr>
               <p:cNvPr id="4" name="TextBox 3">
@@ -31433,7 +31443,7 @@
             </p:txBody>
           </p:sp>
         </mc:Choice>
-        <mc:Fallback>
+        <mc:Fallback xmlns="">
           <p:sp>
             <p:nvSpPr>
               <p:cNvPr id="4" name="TextBox 3">
@@ -31478,8 +31488,8 @@
           </p:sp>
         </mc:Fallback>
       </mc:AlternateContent>
-      <mc:AlternateContent xmlns:mc="http://schemas.openxmlformats.org/markup-compatibility/2006">
-        <mc:Choice xmlns:a14="http://schemas.microsoft.com/office/drawing/2010/main" Requires="a14">
+      <mc:AlternateContent xmlns:mc="http://schemas.openxmlformats.org/markup-compatibility/2006" xmlns:a14="http://schemas.microsoft.com/office/drawing/2010/main">
+        <mc:Choice Requires="a14">
           <p:sp>
             <p:nvSpPr>
               <p:cNvPr id="5" name="TextBox 4">
@@ -31508,6 +31518,7 @@
               </a:bodyPr>
               <a:lstStyle/>
               <a:p>
+                <a:pPr/>
                 <a14:m>
                   <m:oMathPara xmlns:m="http://schemas.openxmlformats.org/officeDocument/2006/math">
                     <m:oMathParaPr>
@@ -31586,7 +31597,7 @@
             </p:txBody>
           </p:sp>
         </mc:Choice>
-        <mc:Fallback>
+        <mc:Fallback xmlns="">
           <p:sp>
             <p:nvSpPr>
               <p:cNvPr id="5" name="TextBox 4">
@@ -31631,8 +31642,8 @@
           </p:sp>
         </mc:Fallback>
       </mc:AlternateContent>
-      <mc:AlternateContent xmlns:mc="http://schemas.openxmlformats.org/markup-compatibility/2006">
-        <mc:Choice xmlns:a14="http://schemas.microsoft.com/office/drawing/2010/main" Requires="a14">
+      <mc:AlternateContent xmlns:mc="http://schemas.openxmlformats.org/markup-compatibility/2006" xmlns:a14="http://schemas.microsoft.com/office/drawing/2010/main">
+        <mc:Choice Requires="a14">
           <p:sp>
             <p:nvSpPr>
               <p:cNvPr id="7" name="TextBox 6">
@@ -31735,7 +31746,7 @@
             </p:txBody>
           </p:sp>
         </mc:Choice>
-        <mc:Fallback>
+        <mc:Fallback xmlns="">
           <p:sp>
             <p:nvSpPr>
               <p:cNvPr id="7" name="TextBox 6">
@@ -31780,8 +31791,8 @@
           </p:sp>
         </mc:Fallback>
       </mc:AlternateContent>
-      <mc:AlternateContent xmlns:mc="http://schemas.openxmlformats.org/markup-compatibility/2006">
-        <mc:Choice xmlns:a14="http://schemas.microsoft.com/office/drawing/2010/main" Requires="a14">
+      <mc:AlternateContent xmlns:mc="http://schemas.openxmlformats.org/markup-compatibility/2006" xmlns:a14="http://schemas.microsoft.com/office/drawing/2010/main">
+        <mc:Choice Requires="a14">
           <p:sp>
             <p:nvSpPr>
               <p:cNvPr id="8" name="TextBox 7">
@@ -31886,7 +31897,7 @@
             </p:txBody>
           </p:sp>
         </mc:Choice>
-        <mc:Fallback>
+        <mc:Fallback xmlns="">
           <p:sp>
             <p:nvSpPr>
               <p:cNvPr id="8" name="TextBox 7">
